--- a/modulo-05/05.05 - Entendendo os Floorplans do SAP Fiori Elements/05.05_Floorplans_do_SAP_Fiori_elements.pptx
+++ b/modulo-05/05.05 - Entendendo os Floorplans do SAP Fiori Elements/05.05_Floorplans_do_SAP_Fiori_elements.pptx
@@ -1639,7 +1639,7 @@
                   <a:srgbClr val="8FA3C7"/>
                 </a:solidFill>
               </a:rPr>
-              <a:t>ABAP Moderno · Módulo 03 — SAP Fiori Elements com OData V4  ·  Aula 5 de 11 — Floorplans</a:t>
+              <a:t>ABAP Moderno · Módulo 05 — SAP Fiori Elements com OData V4  ·  Aula 5 de 11 — Floorplans</a:t>
             </a:r>
             <a:endParaRPr lang="en-US" sz="900" dirty="0"/>
           </a:p>
@@ -1785,7 +1785,7 @@
                   <a:srgbClr val="556B82"/>
                 </a:solidFill>
               </a:rPr>
-              <a:t>ABAP Moderno · Módulo 03 — SAP Fiori Elements com OData V4  ·  Aula 5 de 11 — Floorplans</a:t>
+              <a:t>ABAP Moderno · Módulo 05 — SAP Fiori Elements com OData V4  ·  Aula 5 de 11 — Floorplans</a:t>
             </a:r>
             <a:endParaRPr lang="en-US" sz="900" dirty="0"/>
           </a:p>
@@ -2216,7 +2216,7 @@
                   <a:srgbClr val="89D1FF"/>
                 </a:solidFill>
               </a:rPr>
-              <a:t>MÓDULO 03 · AULA 05 DE 11</a:t>
+              <a:t>MÓDULO 05 · AULA 05 DE 11</a:t>
             </a:r>
             <a:endParaRPr lang="en-US" sz="1400" dirty="0"/>
           </a:p>
@@ -2646,7 +2646,7 @@
                   <a:srgbClr val="8FA3C7"/>
                 </a:solidFill>
               </a:rPr>
-              <a:t>ABAP Moderno · Módulo 03 — SAP Fiori Elements com OData V4 · Design System SAP Horizon</a:t>
+              <a:t>ABAP Moderno · Módulo 05 — SAP Fiori Elements com OData V4 · Design System SAP Horizon</a:t>
             </a:r>
             <a:endParaRPr lang="en-US" sz="1100" dirty="0"/>
           </a:p>
@@ -3500,7 +3500,7 @@
         <p:spPr>
           <a:xfrm>
             <a:off x="640080" y="1700784"/>
-            <a:ext cx="2852928" cy="292608"/>
+            <a:ext cx="2619756" cy="292608"/>
           </a:xfrm>
           <a:prstGeom prst="rect">
             <a:avLst/>
@@ -3520,7 +3520,7 @@
         <p:spPr>
           <a:xfrm>
             <a:off x="640080" y="1700784"/>
-            <a:ext cx="2852928" cy="27432"/>
+            <a:ext cx="2619756" cy="27432"/>
           </a:xfrm>
           <a:prstGeom prst="rect">
             <a:avLst/>
@@ -3540,7 +3540,7 @@
         <p:spPr>
           <a:xfrm>
             <a:off x="731520" y="1719072"/>
-            <a:ext cx="2670048" cy="274320"/>
+            <a:ext cx="2436876" cy="274320"/>
           </a:xfrm>
           <a:prstGeom prst="rect">
             <a:avLst/>
@@ -3561,7 +3561,7 @@
                   <a:srgbClr val="FFFFFF"/>
                 </a:solidFill>
               </a:rPr>
-              <a:t>zc_fe_travel_######.ddlx.asddlxs</a:t>
+              <a:t>zc_pc_pedido_app.ddlx.asddlxs</a:t>
             </a:r>
             <a:endParaRPr lang="en-US" sz="950" dirty="0"/>
           </a:p>
@@ -3597,7 +3597,7 @@
                   <a:srgbClr val="9DA5B4"/>
                 </a:solidFill>
               </a:rPr>
-              <a:t>ZFE_TRAVEL_###### › Metadata Extensions</a:t>
+              <a:t>ZAVBS_PC_PEDIDOS › ZC_PC_PEDIDO_APP (facetas, simplificadas)</a:t>
             </a:r>
             <a:endParaRPr lang="en-US" sz="850" dirty="0"/>
           </a:p>
@@ -3843,26 +3843,6 @@
             </a:r>
             <a:endParaRPr lang="en-US" sz="1050" dirty="0"/>
           </a:p>
-          <a:p>
-            <a:pPr algn="r" indent="0" marL="0">
-              <a:lnSpc>
-                <a:spcPct val="105000"/>
-              </a:lnSpc>
-              <a:buNone/>
-            </a:pPr>
-            <a:r>
-              <a:rPr lang="en-US" sz="1050" dirty="0">
-                <a:solidFill>
-                  <a:srgbClr val="6E7681"/>
-                </a:solidFill>
-                <a:latin typeface="Courier New" pitchFamily="34" charset="0"/>
-                <a:ea typeface="Courier New" pitchFamily="34" charset="-122"/>
-                <a:cs typeface="Courier New" pitchFamily="34" charset="-120"/>
-              </a:rPr>
-              <a:t>12</a:t>
-            </a:r>
-            <a:endParaRPr lang="en-US" sz="1050" dirty="0"/>
-          </a:p>
         </p:txBody>
       </p:sp>
       <p:sp>
@@ -4020,6 +4000,72 @@
                 <a:ea typeface="Courier New" pitchFamily="34" charset="-122"/>
                 <a:cs typeface="Courier New" pitchFamily="34" charset="-120"/>
               </a:rPr>
+              <a:t>id</a:t>
+            </a:r>
+            <a:r>
+              <a:rPr lang="en-US" sz="1050" dirty="0">
+                <a:solidFill>
+                  <a:srgbClr val="CCCCCC"/>
+                </a:solidFill>
+                <a:latin typeface="Courier New" pitchFamily="34" charset="0"/>
+                <a:ea typeface="Courier New" pitchFamily="34" charset="-122"/>
+                <a:cs typeface="Courier New" pitchFamily="34" charset="-120"/>
+              </a:rPr>
+              <a:t>:</a:t>
+            </a:r>
+            <a:r>
+              <a:rPr lang="en-US" sz="1050" dirty="0">
+                <a:solidFill>
+                  <a:srgbClr val="CCCCCC"/>
+                </a:solidFill>
+                <a:latin typeface="Courier New" pitchFamily="34" charset="0"/>
+                <a:ea typeface="Courier New" pitchFamily="34" charset="-122"/>
+                <a:cs typeface="Courier New" pitchFamily="34" charset="-120"/>
+              </a:rPr>
+              <a:t> </a:t>
+            </a:r>
+            <a:r>
+              <a:rPr lang="en-US" sz="1050" dirty="0">
+                <a:solidFill>
+                  <a:srgbClr val="CE9178"/>
+                </a:solidFill>
+                <a:latin typeface="Courier New" pitchFamily="34" charset="0"/>
+                <a:ea typeface="Courier New" pitchFamily="34" charset="-122"/>
+                <a:cs typeface="Courier New" pitchFamily="34" charset="-120"/>
+              </a:rPr>
+              <a:t>'HeaderTotal'</a:t>
+            </a:r>
+            <a:r>
+              <a:rPr lang="en-US" sz="1050" dirty="0">
+                <a:solidFill>
+                  <a:srgbClr val="CCCCCC"/>
+                </a:solidFill>
+                <a:latin typeface="Courier New" pitchFamily="34" charset="0"/>
+                <a:ea typeface="Courier New" pitchFamily="34" charset="-122"/>
+                <a:cs typeface="Courier New" pitchFamily="34" charset="-120"/>
+              </a:rPr>
+              <a:t>,</a:t>
+            </a:r>
+            <a:r>
+              <a:rPr lang="en-US" sz="1050" dirty="0">
+                <a:solidFill>
+                  <a:srgbClr val="CCCCCC"/>
+                </a:solidFill>
+                <a:latin typeface="Courier New" pitchFamily="34" charset="0"/>
+                <a:ea typeface="Courier New" pitchFamily="34" charset="-122"/>
+                <a:cs typeface="Courier New" pitchFamily="34" charset="-120"/>
+              </a:rPr>
+              <a:t> </a:t>
+            </a:r>
+            <a:r>
+              <a:rPr lang="en-US" sz="1050" dirty="0">
+                <a:solidFill>
+                  <a:srgbClr val="CCCCCC"/>
+                </a:solidFill>
+                <a:latin typeface="Courier New" pitchFamily="34" charset="0"/>
+                <a:ea typeface="Courier New" pitchFamily="34" charset="-122"/>
+                <a:cs typeface="Courier New" pitchFamily="34" charset="-120"/>
+              </a:rPr>
               <a:t>purpose</a:t>
             </a:r>
             <a:r>
@@ -4130,7 +4176,7 @@
                 <a:ea typeface="Courier New" pitchFamily="34" charset="-122"/>
                 <a:cs typeface="Courier New" pitchFamily="34" charset="-120"/>
               </a:rPr>
-              <a:t>10</a:t>
+              <a:t>30</a:t>
             </a:r>
             <a:r>
               <a:rPr lang="en-US" sz="1050" dirty="0">
@@ -4282,7 +4328,7 @@
                 <a:ea typeface="Courier New" pitchFamily="34" charset="-122"/>
                 <a:cs typeface="Courier New" pitchFamily="34" charset="-120"/>
               </a:rPr>
-              <a:t>'PriceData'</a:t>
+              <a:t>'ValorTotal'</a:t>
             </a:r>
             <a:r>
               <a:rPr lang="en-US" sz="1050" dirty="0">
@@ -4421,7 +4467,7 @@
                 <a:ea typeface="Courier New" pitchFamily="34" charset="-122"/>
                 <a:cs typeface="Courier New" pitchFamily="34" charset="-120"/>
               </a:rPr>
-              <a:t>'GeneralInfo'</a:t>
+              <a:t>'DadosCliente'</a:t>
             </a:r>
             <a:r>
               <a:rPr lang="en-US" sz="1050" dirty="0">
@@ -4498,7 +4544,7 @@
                 <a:ea typeface="Courier New" pitchFamily="34" charset="-122"/>
                 <a:cs typeface="Courier New" pitchFamily="34" charset="-120"/>
               </a:rPr>
-              <a:t>COLLECTION</a:t>
+              <a:t>FIELDGROUP_REFERENCE</a:t>
             </a:r>
             <a:r>
               <a:rPr lang="en-US" sz="1050" dirty="0">
@@ -4573,7 +4619,7 @@
                 <a:ea typeface="Courier New" pitchFamily="34" charset="-122"/>
                 <a:cs typeface="Courier New" pitchFamily="34" charset="-120"/>
               </a:rPr>
-              <a:t>'General Information'</a:t>
+              <a:t>'Dados do Cliente'</a:t>
             </a:r>
             <a:r>
               <a:rPr lang="en-US" sz="1050" dirty="0">
@@ -4640,28 +4686,6 @@
                 <a:cs typeface="Courier New" pitchFamily="34" charset="-120"/>
               </a:rPr>
               <a:t>10</a:t>
-            </a:r>
-            <a:r>
-              <a:rPr lang="en-US" sz="1050" dirty="0">
-                <a:solidFill>
-                  <a:srgbClr val="CCCCCC"/>
-                </a:solidFill>
-                <a:latin typeface="Courier New" pitchFamily="34" charset="0"/>
-                <a:ea typeface="Courier New" pitchFamily="34" charset="-122"/>
-                <a:cs typeface="Courier New" pitchFamily="34" charset="-120"/>
-              </a:rPr>
-              <a:t> </a:t>
-            </a:r>
-            <a:r>
-              <a:rPr lang="en-US" sz="1050" dirty="0">
-                <a:solidFill>
-                  <a:srgbClr val="CCCCCC"/>
-                </a:solidFill>
-                <a:latin typeface="Courier New" pitchFamily="34" charset="0"/>
-                <a:ea typeface="Courier New" pitchFamily="34" charset="-122"/>
-                <a:cs typeface="Courier New" pitchFamily="34" charset="-120"/>
-              </a:rPr>
-              <a:t>}</a:t>
             </a:r>
             <a:r>
               <a:rPr lang="en-US" sz="1050" dirty="0">
@@ -4692,7 +4716,7 @@
                 <a:ea typeface="Courier New" pitchFamily="34" charset="-122"/>
                 <a:cs typeface="Courier New" pitchFamily="34" charset="-120"/>
               </a:rPr>
-              <a:t>  </a:t>
+              <a:t>    </a:t>
             </a:r>
             <a:r>
               <a:rPr lang="en-US" sz="1050" dirty="0">
@@ -4703,7 +4727,7 @@
                 <a:ea typeface="Courier New" pitchFamily="34" charset="-122"/>
                 <a:cs typeface="Courier New" pitchFamily="34" charset="-120"/>
               </a:rPr>
-              <a:t>{</a:t>
+              <a:t>targetQualifier</a:t>
             </a:r>
             <a:r>
               <a:rPr lang="en-US" sz="1050" dirty="0">
@@ -4714,18 +4738,40 @@
                 <a:ea typeface="Courier New" pitchFamily="34" charset="-122"/>
                 <a:cs typeface="Courier New" pitchFamily="34" charset="-120"/>
               </a:rPr>
+              <a:t>:</a:t>
+            </a:r>
+            <a:r>
+              <a:rPr lang="en-US" sz="1050" dirty="0">
+                <a:solidFill>
+                  <a:srgbClr val="CCCCCC"/>
+                </a:solidFill>
+                <a:latin typeface="Courier New" pitchFamily="34" charset="0"/>
+                <a:ea typeface="Courier New" pitchFamily="34" charset="-122"/>
+                <a:cs typeface="Courier New" pitchFamily="34" charset="-120"/>
+              </a:rPr>
               <a:t> </a:t>
             </a:r>
             <a:r>
               <a:rPr lang="en-US" sz="1050" dirty="0">
                 <a:solidFill>
+                  <a:srgbClr val="CE9178"/>
+                </a:solidFill>
+                <a:latin typeface="Courier New" pitchFamily="34" charset="0"/>
+                <a:ea typeface="Courier New" pitchFamily="34" charset="-122"/>
+                <a:cs typeface="Courier New" pitchFamily="34" charset="-120"/>
+              </a:rPr>
+              <a:t>'Cliente'</a:t>
+            </a:r>
+            <a:r>
+              <a:rPr lang="en-US" sz="1050" dirty="0">
+                <a:solidFill>
                   <a:srgbClr val="CCCCCC"/>
                 </a:solidFill>
                 <a:latin typeface="Courier New" pitchFamily="34" charset="0"/>
                 <a:ea typeface="Courier New" pitchFamily="34" charset="-122"/>
                 <a:cs typeface="Courier New" pitchFamily="34" charset="-120"/>
               </a:rPr>
-              <a:t>label</a:t>
+              <a:t> </a:t>
             </a:r>
             <a:r>
               <a:rPr lang="en-US" sz="1050" dirty="0">
@@ -4736,106 +4782,7 @@
                 <a:ea typeface="Courier New" pitchFamily="34" charset="-122"/>
                 <a:cs typeface="Courier New" pitchFamily="34" charset="-120"/>
               </a:rPr>
-              <a:t>:</a:t>
-            </a:r>
-            <a:r>
-              <a:rPr lang="en-US" sz="1050" dirty="0">
-                <a:solidFill>
-                  <a:srgbClr val="CCCCCC"/>
-                </a:solidFill>
-                <a:latin typeface="Courier New" pitchFamily="34" charset="0"/>
-                <a:ea typeface="Courier New" pitchFamily="34" charset="-122"/>
-                <a:cs typeface="Courier New" pitchFamily="34" charset="-120"/>
-              </a:rPr>
-              <a:t> </a:t>
-            </a:r>
-            <a:r>
-              <a:rPr lang="en-US" sz="1050" dirty="0">
-                <a:solidFill>
-                  <a:srgbClr val="CE9178"/>
-                </a:solidFill>
-                <a:latin typeface="Courier New" pitchFamily="34" charset="0"/>
-                <a:ea typeface="Courier New" pitchFamily="34" charset="-122"/>
-                <a:cs typeface="Courier New" pitchFamily="34" charset="-120"/>
-              </a:rPr>
-              <a:t>'Prices'</a:t>
-            </a:r>
-            <a:r>
-              <a:rPr lang="en-US" sz="1050" dirty="0">
-                <a:solidFill>
-                  <a:srgbClr val="CCCCCC"/>
-                </a:solidFill>
-                <a:latin typeface="Courier New" pitchFamily="34" charset="0"/>
-                <a:ea typeface="Courier New" pitchFamily="34" charset="-122"/>
-                <a:cs typeface="Courier New" pitchFamily="34" charset="-120"/>
-              </a:rPr>
-              <a:t>,</a:t>
-            </a:r>
-            <a:r>
-              <a:rPr lang="en-US" sz="1050" dirty="0">
-                <a:solidFill>
-                  <a:srgbClr val="CCCCCC"/>
-                </a:solidFill>
-                <a:latin typeface="Courier New" pitchFamily="34" charset="0"/>
-                <a:ea typeface="Courier New" pitchFamily="34" charset="-122"/>
-                <a:cs typeface="Courier New" pitchFamily="34" charset="-120"/>
-              </a:rPr>
-              <a:t> </a:t>
-            </a:r>
-            <a:r>
-              <a:rPr lang="en-US" sz="1050" dirty="0">
-                <a:solidFill>
-                  <a:srgbClr val="CCCCCC"/>
-                </a:solidFill>
-                <a:latin typeface="Courier New" pitchFamily="34" charset="0"/>
-                <a:ea typeface="Courier New" pitchFamily="34" charset="-122"/>
-                <a:cs typeface="Courier New" pitchFamily="34" charset="-120"/>
-              </a:rPr>
-              <a:t>type</a:t>
-            </a:r>
-            <a:r>
-              <a:rPr lang="en-US" sz="1050" dirty="0">
-                <a:solidFill>
-                  <a:srgbClr val="CCCCCC"/>
-                </a:solidFill>
-                <a:latin typeface="Courier New" pitchFamily="34" charset="0"/>
-                <a:ea typeface="Courier New" pitchFamily="34" charset="-122"/>
-                <a:cs typeface="Courier New" pitchFamily="34" charset="-120"/>
-              </a:rPr>
-              <a:t>:</a:t>
-            </a:r>
-            <a:r>
-              <a:rPr lang="en-US" sz="1050" dirty="0">
-                <a:solidFill>
-                  <a:srgbClr val="CCCCCC"/>
-                </a:solidFill>
-                <a:latin typeface="Courier New" pitchFamily="34" charset="0"/>
-                <a:ea typeface="Courier New" pitchFamily="34" charset="-122"/>
-                <a:cs typeface="Courier New" pitchFamily="34" charset="-120"/>
-              </a:rPr>
-              <a:t> </a:t>
-            </a:r>
-            <a:r>
-              <a:rPr lang="en-US" sz="1050" dirty="0">
-                <a:solidFill>
-                  <a:srgbClr val="CCCCCC"/>
-                </a:solidFill>
-                <a:latin typeface="Courier New" pitchFamily="34" charset="0"/>
-                <a:ea typeface="Courier New" pitchFamily="34" charset="-122"/>
-                <a:cs typeface="Courier New" pitchFamily="34" charset="-120"/>
-              </a:rPr>
-              <a:t>#</a:t>
-            </a:r>
-            <a:r>
-              <a:rPr lang="en-US" sz="1050" dirty="0">
-                <a:solidFill>
-                  <a:srgbClr val="CCCCCC"/>
-                </a:solidFill>
-                <a:latin typeface="Courier New" pitchFamily="34" charset="0"/>
-                <a:ea typeface="Courier New" pitchFamily="34" charset="-122"/>
-                <a:cs typeface="Courier New" pitchFamily="34" charset="-120"/>
-              </a:rPr>
-              <a:t>FIELDGROUP_REFERENCE</a:t>
+              <a:t>}</a:t>
             </a:r>
             <a:r>
               <a:rPr lang="en-US" sz="1050" dirty="0">
@@ -4860,156 +4807,13 @@
             <a:r>
               <a:rPr lang="en-US" sz="1050" dirty="0">
                 <a:solidFill>
-                  <a:srgbClr val="CCCCCC"/>
-                </a:solidFill>
-                <a:latin typeface="Courier New" pitchFamily="34" charset="0"/>
-                <a:ea typeface="Courier New" pitchFamily="34" charset="-122"/>
-                <a:cs typeface="Courier New" pitchFamily="34" charset="-120"/>
-              </a:rPr>
-              <a:t>    </a:t>
-            </a:r>
-            <a:r>
-              <a:rPr lang="en-US" sz="1050" dirty="0">
-                <a:solidFill>
-                  <a:srgbClr val="CCCCCC"/>
-                </a:solidFill>
-                <a:latin typeface="Courier New" pitchFamily="34" charset="0"/>
-                <a:ea typeface="Courier New" pitchFamily="34" charset="-122"/>
-                <a:cs typeface="Courier New" pitchFamily="34" charset="-120"/>
-              </a:rPr>
-              <a:t>parentId</a:t>
-            </a:r>
-            <a:r>
-              <a:rPr lang="en-US" sz="1050" dirty="0">
-                <a:solidFill>
-                  <a:srgbClr val="CCCCCC"/>
-                </a:solidFill>
-                <a:latin typeface="Courier New" pitchFamily="34" charset="0"/>
-                <a:ea typeface="Courier New" pitchFamily="34" charset="-122"/>
-                <a:cs typeface="Courier New" pitchFamily="34" charset="-120"/>
-              </a:rPr>
-              <a:t>:</a:t>
-            </a:r>
-            <a:r>
-              <a:rPr lang="en-US" sz="1050" dirty="0">
-                <a:solidFill>
-                  <a:srgbClr val="CCCCCC"/>
+                  <a:srgbClr val="000000"/>
                 </a:solidFill>
                 <a:latin typeface="Courier New" pitchFamily="34" charset="0"/>
                 <a:ea typeface="Courier New" pitchFamily="34" charset="-122"/>
                 <a:cs typeface="Courier New" pitchFamily="34" charset="-120"/>
               </a:rPr>
               <a:t> </a:t>
-            </a:r>
-            <a:r>
-              <a:rPr lang="en-US" sz="1050" dirty="0">
-                <a:solidFill>
-                  <a:srgbClr val="CE9178"/>
-                </a:solidFill>
-                <a:latin typeface="Courier New" pitchFamily="34" charset="0"/>
-                <a:ea typeface="Courier New" pitchFamily="34" charset="-122"/>
-                <a:cs typeface="Courier New" pitchFamily="34" charset="-120"/>
-              </a:rPr>
-              <a:t>'GeneralInfo'</a:t>
-            </a:r>
-            <a:r>
-              <a:rPr lang="en-US" sz="1050" dirty="0">
-                <a:solidFill>
-                  <a:srgbClr val="CCCCCC"/>
-                </a:solidFill>
-                <a:latin typeface="Courier New" pitchFamily="34" charset="0"/>
-                <a:ea typeface="Courier New" pitchFamily="34" charset="-122"/>
-                <a:cs typeface="Courier New" pitchFamily="34" charset="-120"/>
-              </a:rPr>
-              <a:t>,</a:t>
-            </a:r>
-            <a:r>
-              <a:rPr lang="en-US" sz="1050" dirty="0">
-                <a:solidFill>
-                  <a:srgbClr val="CCCCCC"/>
-                </a:solidFill>
-                <a:latin typeface="Courier New" pitchFamily="34" charset="0"/>
-                <a:ea typeface="Courier New" pitchFamily="34" charset="-122"/>
-                <a:cs typeface="Courier New" pitchFamily="34" charset="-120"/>
-              </a:rPr>
-              <a:t> </a:t>
-            </a:r>
-            <a:r>
-              <a:rPr lang="en-US" sz="1050" dirty="0">
-                <a:solidFill>
-                  <a:srgbClr val="CCCCCC"/>
-                </a:solidFill>
-                <a:latin typeface="Courier New" pitchFamily="34" charset="0"/>
-                <a:ea typeface="Courier New" pitchFamily="34" charset="-122"/>
-                <a:cs typeface="Courier New" pitchFamily="34" charset="-120"/>
-              </a:rPr>
-              <a:t>targetQualifier</a:t>
-            </a:r>
-            <a:r>
-              <a:rPr lang="en-US" sz="1050" dirty="0">
-                <a:solidFill>
-                  <a:srgbClr val="CCCCCC"/>
-                </a:solidFill>
-                <a:latin typeface="Courier New" pitchFamily="34" charset="0"/>
-                <a:ea typeface="Courier New" pitchFamily="34" charset="-122"/>
-                <a:cs typeface="Courier New" pitchFamily="34" charset="-120"/>
-              </a:rPr>
-              <a:t>:</a:t>
-            </a:r>
-            <a:r>
-              <a:rPr lang="en-US" sz="1050" dirty="0">
-                <a:solidFill>
-                  <a:srgbClr val="CCCCCC"/>
-                </a:solidFill>
-                <a:latin typeface="Courier New" pitchFamily="34" charset="0"/>
-                <a:ea typeface="Courier New" pitchFamily="34" charset="-122"/>
-                <a:cs typeface="Courier New" pitchFamily="34" charset="-120"/>
-              </a:rPr>
-              <a:t> </a:t>
-            </a:r>
-            <a:r>
-              <a:rPr lang="en-US" sz="1050" dirty="0">
-                <a:solidFill>
-                  <a:srgbClr val="CE9178"/>
-                </a:solidFill>
-                <a:latin typeface="Courier New" pitchFamily="34" charset="0"/>
-                <a:ea typeface="Courier New" pitchFamily="34" charset="-122"/>
-                <a:cs typeface="Courier New" pitchFamily="34" charset="-120"/>
-              </a:rPr>
-              <a:t>'PricesGroup'</a:t>
-            </a:r>
-            <a:r>
-              <a:rPr lang="en-US" sz="1050" dirty="0">
-                <a:solidFill>
-                  <a:srgbClr val="CCCCCC"/>
-                </a:solidFill>
-                <a:latin typeface="Courier New" pitchFamily="34" charset="0"/>
-                <a:ea typeface="Courier New" pitchFamily="34" charset="-122"/>
-                <a:cs typeface="Courier New" pitchFamily="34" charset="-120"/>
-              </a:rPr>
-              <a:t> </a:t>
-            </a:r>
-            <a:r>
-              <a:rPr lang="en-US" sz="1050" dirty="0">
-                <a:solidFill>
-                  <a:srgbClr val="CCCCCC"/>
-                </a:solidFill>
-                <a:latin typeface="Courier New" pitchFamily="34" charset="0"/>
-                <a:ea typeface="Courier New" pitchFamily="34" charset="-122"/>
-                <a:cs typeface="Courier New" pitchFamily="34" charset="-120"/>
-              </a:rPr>
-              <a:t>}</a:t>
-            </a:r>
-            <a:r>
-              <a:rPr lang="en-US" sz="1050" dirty="0">
-                <a:solidFill>
-                  <a:srgbClr val="CCCCCC"/>
-                </a:solidFill>
-                <a:latin typeface="Courier New" pitchFamily="34" charset="0"/>
-                <a:ea typeface="Courier New" pitchFamily="34" charset="-122"/>
-                <a:cs typeface="Courier New" pitchFamily="34" charset="-120"/>
-              </a:rPr>
-              <a:t>,</a:t>
             </a:r>
             <a:endParaRPr lang="en-US" sz="1050" dirty="0"/>
           </a:p>
@@ -5023,13 +4827,222 @@
             <a:r>
               <a:rPr lang="en-US" sz="1050" dirty="0">
                 <a:solidFill>
-                  <a:srgbClr val="000000"/>
+                  <a:srgbClr val="CCCCCC"/>
+                </a:solidFill>
+                <a:latin typeface="Courier New" pitchFamily="34" charset="0"/>
+                <a:ea typeface="Courier New" pitchFamily="34" charset="-122"/>
+                <a:cs typeface="Courier New" pitchFamily="34" charset="-120"/>
+              </a:rPr>
+              <a:t>  </a:t>
+            </a:r>
+            <a:r>
+              <a:rPr lang="en-US" sz="1050" dirty="0">
+                <a:solidFill>
+                  <a:srgbClr val="CCCCCC"/>
+                </a:solidFill>
+                <a:latin typeface="Courier New" pitchFamily="34" charset="0"/>
+                <a:ea typeface="Courier New" pitchFamily="34" charset="-122"/>
+                <a:cs typeface="Courier New" pitchFamily="34" charset="-120"/>
+              </a:rPr>
+              <a:t>{</a:t>
+            </a:r>
+            <a:r>
+              <a:rPr lang="en-US" sz="1050" dirty="0">
+                <a:solidFill>
+                  <a:srgbClr val="CCCCCC"/>
                 </a:solidFill>
                 <a:latin typeface="Courier New" pitchFamily="34" charset="0"/>
                 <a:ea typeface="Courier New" pitchFamily="34" charset="-122"/>
                 <a:cs typeface="Courier New" pitchFamily="34" charset="-120"/>
               </a:rPr>
               <a:t> </a:t>
+            </a:r>
+            <a:r>
+              <a:rPr lang="en-US" sz="1050" dirty="0">
+                <a:solidFill>
+                  <a:srgbClr val="CCCCCC"/>
+                </a:solidFill>
+                <a:latin typeface="Courier New" pitchFamily="34" charset="0"/>
+                <a:ea typeface="Courier New" pitchFamily="34" charset="-122"/>
+                <a:cs typeface="Courier New" pitchFamily="34" charset="-120"/>
+              </a:rPr>
+              <a:t>id</a:t>
+            </a:r>
+            <a:r>
+              <a:rPr lang="en-US" sz="1050" dirty="0">
+                <a:solidFill>
+                  <a:srgbClr val="CCCCCC"/>
+                </a:solidFill>
+                <a:latin typeface="Courier New" pitchFamily="34" charset="0"/>
+                <a:ea typeface="Courier New" pitchFamily="34" charset="-122"/>
+                <a:cs typeface="Courier New" pitchFamily="34" charset="-120"/>
+              </a:rPr>
+              <a:t>:</a:t>
+            </a:r>
+            <a:r>
+              <a:rPr lang="en-US" sz="1050" dirty="0">
+                <a:solidFill>
+                  <a:srgbClr val="CCCCCC"/>
+                </a:solidFill>
+                <a:latin typeface="Courier New" pitchFamily="34" charset="0"/>
+                <a:ea typeface="Courier New" pitchFamily="34" charset="-122"/>
+                <a:cs typeface="Courier New" pitchFamily="34" charset="-120"/>
+              </a:rPr>
+              <a:t> </a:t>
+            </a:r>
+            <a:r>
+              <a:rPr lang="en-US" sz="1050" dirty="0">
+                <a:solidFill>
+                  <a:srgbClr val="CE9178"/>
+                </a:solidFill>
+                <a:latin typeface="Courier New" pitchFamily="34" charset="0"/>
+                <a:ea typeface="Courier New" pitchFamily="34" charset="-122"/>
+                <a:cs typeface="Courier New" pitchFamily="34" charset="-120"/>
+              </a:rPr>
+              <a:t>'Itens'</a:t>
+            </a:r>
+            <a:r>
+              <a:rPr lang="en-US" sz="1050" dirty="0">
+                <a:solidFill>
+                  <a:srgbClr val="CCCCCC"/>
+                </a:solidFill>
+                <a:latin typeface="Courier New" pitchFamily="34" charset="0"/>
+                <a:ea typeface="Courier New" pitchFamily="34" charset="-122"/>
+                <a:cs typeface="Courier New" pitchFamily="34" charset="-120"/>
+              </a:rPr>
+              <a:t>,</a:t>
+            </a:r>
+            <a:r>
+              <a:rPr lang="en-US" sz="1050" dirty="0">
+                <a:solidFill>
+                  <a:srgbClr val="CCCCCC"/>
+                </a:solidFill>
+                <a:latin typeface="Courier New" pitchFamily="34" charset="0"/>
+                <a:ea typeface="Courier New" pitchFamily="34" charset="-122"/>
+                <a:cs typeface="Courier New" pitchFamily="34" charset="-120"/>
+              </a:rPr>
+              <a:t> </a:t>
+            </a:r>
+            <a:r>
+              <a:rPr lang="en-US" sz="1050" dirty="0">
+                <a:solidFill>
+                  <a:srgbClr val="CCCCCC"/>
+                </a:solidFill>
+                <a:latin typeface="Courier New" pitchFamily="34" charset="0"/>
+                <a:ea typeface="Courier New" pitchFamily="34" charset="-122"/>
+                <a:cs typeface="Courier New" pitchFamily="34" charset="-120"/>
+              </a:rPr>
+              <a:t>label</a:t>
+            </a:r>
+            <a:r>
+              <a:rPr lang="en-US" sz="1050" dirty="0">
+                <a:solidFill>
+                  <a:srgbClr val="CCCCCC"/>
+                </a:solidFill>
+                <a:latin typeface="Courier New" pitchFamily="34" charset="0"/>
+                <a:ea typeface="Courier New" pitchFamily="34" charset="-122"/>
+                <a:cs typeface="Courier New" pitchFamily="34" charset="-120"/>
+              </a:rPr>
+              <a:t>:</a:t>
+            </a:r>
+            <a:r>
+              <a:rPr lang="en-US" sz="1050" dirty="0">
+                <a:solidFill>
+                  <a:srgbClr val="CCCCCC"/>
+                </a:solidFill>
+                <a:latin typeface="Courier New" pitchFamily="34" charset="0"/>
+                <a:ea typeface="Courier New" pitchFamily="34" charset="-122"/>
+                <a:cs typeface="Courier New" pitchFamily="34" charset="-120"/>
+              </a:rPr>
+              <a:t> </a:t>
+            </a:r>
+            <a:r>
+              <a:rPr lang="en-US" sz="1050" dirty="0">
+                <a:solidFill>
+                  <a:srgbClr val="CE9178"/>
+                </a:solidFill>
+                <a:latin typeface="Courier New" pitchFamily="34" charset="0"/>
+                <a:ea typeface="Courier New" pitchFamily="34" charset="-122"/>
+                <a:cs typeface="Courier New" pitchFamily="34" charset="-120"/>
+              </a:rPr>
+              <a:t>'Itens'</a:t>
+            </a:r>
+            <a:r>
+              <a:rPr lang="en-US" sz="1050" dirty="0">
+                <a:solidFill>
+                  <a:srgbClr val="CCCCCC"/>
+                </a:solidFill>
+                <a:latin typeface="Courier New" pitchFamily="34" charset="0"/>
+                <a:ea typeface="Courier New" pitchFamily="34" charset="-122"/>
+                <a:cs typeface="Courier New" pitchFamily="34" charset="-120"/>
+              </a:rPr>
+              <a:t>,</a:t>
+            </a:r>
+            <a:r>
+              <a:rPr lang="en-US" sz="1050" dirty="0">
+                <a:solidFill>
+                  <a:srgbClr val="CCCCCC"/>
+                </a:solidFill>
+                <a:latin typeface="Courier New" pitchFamily="34" charset="0"/>
+                <a:ea typeface="Courier New" pitchFamily="34" charset="-122"/>
+                <a:cs typeface="Courier New" pitchFamily="34" charset="-120"/>
+              </a:rPr>
+              <a:t> </a:t>
+            </a:r>
+            <a:r>
+              <a:rPr lang="en-US" sz="1050" dirty="0">
+                <a:solidFill>
+                  <a:srgbClr val="CCCCCC"/>
+                </a:solidFill>
+                <a:latin typeface="Courier New" pitchFamily="34" charset="0"/>
+                <a:ea typeface="Courier New" pitchFamily="34" charset="-122"/>
+                <a:cs typeface="Courier New" pitchFamily="34" charset="-120"/>
+              </a:rPr>
+              <a:t>position</a:t>
+            </a:r>
+            <a:r>
+              <a:rPr lang="en-US" sz="1050" dirty="0">
+                <a:solidFill>
+                  <a:srgbClr val="CCCCCC"/>
+                </a:solidFill>
+                <a:latin typeface="Courier New" pitchFamily="34" charset="0"/>
+                <a:ea typeface="Courier New" pitchFamily="34" charset="-122"/>
+                <a:cs typeface="Courier New" pitchFamily="34" charset="-120"/>
+              </a:rPr>
+              <a:t>:</a:t>
+            </a:r>
+            <a:r>
+              <a:rPr lang="en-US" sz="1050" dirty="0">
+                <a:solidFill>
+                  <a:srgbClr val="CCCCCC"/>
+                </a:solidFill>
+                <a:latin typeface="Courier New" pitchFamily="34" charset="0"/>
+                <a:ea typeface="Courier New" pitchFamily="34" charset="-122"/>
+                <a:cs typeface="Courier New" pitchFamily="34" charset="-120"/>
+              </a:rPr>
+              <a:t> </a:t>
+            </a:r>
+            <a:r>
+              <a:rPr lang="en-US" sz="1050" dirty="0">
+                <a:solidFill>
+                  <a:srgbClr val="B5CEA8"/>
+                </a:solidFill>
+                <a:latin typeface="Courier New" pitchFamily="34" charset="0"/>
+                <a:ea typeface="Courier New" pitchFamily="34" charset="-122"/>
+                <a:cs typeface="Courier New" pitchFamily="34" charset="-120"/>
+              </a:rPr>
+              <a:t>30</a:t>
+            </a:r>
+            <a:r>
+              <a:rPr lang="en-US" sz="1050" dirty="0">
+                <a:solidFill>
+                  <a:srgbClr val="CCCCCC"/>
+                </a:solidFill>
+                <a:latin typeface="Courier New" pitchFamily="34" charset="0"/>
+                <a:ea typeface="Courier New" pitchFamily="34" charset="-122"/>
+                <a:cs typeface="Courier New" pitchFamily="34" charset="-120"/>
+              </a:rPr>
+              <a:t>,</a:t>
             </a:r>
             <a:endParaRPr lang="en-US" sz="1050" dirty="0"/>
           </a:p>
@@ -5049,7 +5062,7 @@
                 <a:ea typeface="Courier New" pitchFamily="34" charset="-122"/>
                 <a:cs typeface="Courier New" pitchFamily="34" charset="-120"/>
               </a:rPr>
-              <a:t>  </a:t>
+              <a:t>    </a:t>
             </a:r>
             <a:r>
               <a:rPr lang="en-US" sz="1050" dirty="0">
@@ -5060,7 +5073,7 @@
                 <a:ea typeface="Courier New" pitchFamily="34" charset="-122"/>
                 <a:cs typeface="Courier New" pitchFamily="34" charset="-120"/>
               </a:rPr>
-              <a:t>{</a:t>
+              <a:t>type</a:t>
             </a:r>
             <a:r>
               <a:rPr lang="en-US" sz="1050" dirty="0">
@@ -5071,6 +5084,17 @@
                 <a:ea typeface="Courier New" pitchFamily="34" charset="-122"/>
                 <a:cs typeface="Courier New" pitchFamily="34" charset="-120"/>
               </a:rPr>
+              <a:t>:</a:t>
+            </a:r>
+            <a:r>
+              <a:rPr lang="en-US" sz="1050" dirty="0">
+                <a:solidFill>
+                  <a:srgbClr val="CCCCCC"/>
+                </a:solidFill>
+                <a:latin typeface="Courier New" pitchFamily="34" charset="0"/>
+                <a:ea typeface="Courier New" pitchFamily="34" charset="-122"/>
+                <a:cs typeface="Courier New" pitchFamily="34" charset="-120"/>
+              </a:rPr>
               <a:t> </a:t>
             </a:r>
             <a:r>
@@ -5082,7 +5106,7 @@
                 <a:ea typeface="Courier New" pitchFamily="34" charset="-122"/>
                 <a:cs typeface="Courier New" pitchFamily="34" charset="-120"/>
               </a:rPr>
-              <a:t>id</a:t>
+              <a:t>#</a:t>
             </a:r>
             <a:r>
               <a:rPr lang="en-US" sz="1050" dirty="0">
@@ -5093,6 +5117,50 @@
                 <a:ea typeface="Courier New" pitchFamily="34" charset="-122"/>
                 <a:cs typeface="Courier New" pitchFamily="34" charset="-120"/>
               </a:rPr>
+              <a:t>LINEITEM_REFERENCE</a:t>
+            </a:r>
+            <a:r>
+              <a:rPr lang="en-US" sz="1050" dirty="0">
+                <a:solidFill>
+                  <a:srgbClr val="CCCCCC"/>
+                </a:solidFill>
+                <a:latin typeface="Courier New" pitchFamily="34" charset="0"/>
+                <a:ea typeface="Courier New" pitchFamily="34" charset="-122"/>
+                <a:cs typeface="Courier New" pitchFamily="34" charset="-120"/>
+              </a:rPr>
+              <a:t>,</a:t>
+            </a:r>
+            <a:r>
+              <a:rPr lang="en-US" sz="1050" dirty="0">
+                <a:solidFill>
+                  <a:srgbClr val="CCCCCC"/>
+                </a:solidFill>
+                <a:latin typeface="Courier New" pitchFamily="34" charset="0"/>
+                <a:ea typeface="Courier New" pitchFamily="34" charset="-122"/>
+                <a:cs typeface="Courier New" pitchFamily="34" charset="-120"/>
+              </a:rPr>
+              <a:t> </a:t>
+            </a:r>
+            <a:r>
+              <a:rPr lang="en-US" sz="1050" dirty="0">
+                <a:solidFill>
+                  <a:srgbClr val="CCCCCC"/>
+                </a:solidFill>
+                <a:latin typeface="Courier New" pitchFamily="34" charset="0"/>
+                <a:ea typeface="Courier New" pitchFamily="34" charset="-122"/>
+                <a:cs typeface="Courier New" pitchFamily="34" charset="-120"/>
+              </a:rPr>
+              <a:t>targetElement</a:t>
+            </a:r>
+            <a:r>
+              <a:rPr lang="en-US" sz="1050" dirty="0">
+                <a:solidFill>
+                  <a:srgbClr val="CCCCCC"/>
+                </a:solidFill>
+                <a:latin typeface="Courier New" pitchFamily="34" charset="0"/>
+                <a:ea typeface="Courier New" pitchFamily="34" charset="-122"/>
+                <a:cs typeface="Courier New" pitchFamily="34" charset="-120"/>
+              </a:rPr>
               <a:t>:</a:t>
             </a:r>
             <a:r>
@@ -5115,291 +5183,7 @@
                 <a:ea typeface="Courier New" pitchFamily="34" charset="-122"/>
                 <a:cs typeface="Courier New" pitchFamily="34" charset="-120"/>
               </a:rPr>
-              <a:t>'Bookings'</a:t>
-            </a:r>
-            <a:r>
-              <a:rPr lang="en-US" sz="1050" dirty="0">
-                <a:solidFill>
-                  <a:srgbClr val="CCCCCC"/>
-                </a:solidFill>
-                <a:latin typeface="Courier New" pitchFamily="34" charset="0"/>
-                <a:ea typeface="Courier New" pitchFamily="34" charset="-122"/>
-                <a:cs typeface="Courier New" pitchFamily="34" charset="-120"/>
-              </a:rPr>
-              <a:t>,</a:t>
-            </a:r>
-            <a:r>
-              <a:rPr lang="en-US" sz="1050" dirty="0">
-                <a:solidFill>
-                  <a:srgbClr val="CCCCCC"/>
-                </a:solidFill>
-                <a:latin typeface="Courier New" pitchFamily="34" charset="0"/>
-                <a:ea typeface="Courier New" pitchFamily="34" charset="-122"/>
-                <a:cs typeface="Courier New" pitchFamily="34" charset="-120"/>
-              </a:rPr>
-              <a:t> </a:t>
-            </a:r>
-            <a:r>
-              <a:rPr lang="en-US" sz="1050" dirty="0">
-                <a:solidFill>
-                  <a:srgbClr val="CCCCCC"/>
-                </a:solidFill>
-                <a:latin typeface="Courier New" pitchFamily="34" charset="0"/>
-                <a:ea typeface="Courier New" pitchFamily="34" charset="-122"/>
-                <a:cs typeface="Courier New" pitchFamily="34" charset="-120"/>
-              </a:rPr>
-              <a:t>label</a:t>
-            </a:r>
-            <a:r>
-              <a:rPr lang="en-US" sz="1050" dirty="0">
-                <a:solidFill>
-                  <a:srgbClr val="CCCCCC"/>
-                </a:solidFill>
-                <a:latin typeface="Courier New" pitchFamily="34" charset="0"/>
-                <a:ea typeface="Courier New" pitchFamily="34" charset="-122"/>
-                <a:cs typeface="Courier New" pitchFamily="34" charset="-120"/>
-              </a:rPr>
-              <a:t>:</a:t>
-            </a:r>
-            <a:r>
-              <a:rPr lang="en-US" sz="1050" dirty="0">
-                <a:solidFill>
-                  <a:srgbClr val="CCCCCC"/>
-                </a:solidFill>
-                <a:latin typeface="Courier New" pitchFamily="34" charset="0"/>
-                <a:ea typeface="Courier New" pitchFamily="34" charset="-122"/>
-                <a:cs typeface="Courier New" pitchFamily="34" charset="-120"/>
-              </a:rPr>
-              <a:t> </a:t>
-            </a:r>
-            <a:r>
-              <a:rPr lang="en-US" sz="1050" dirty="0">
-                <a:solidFill>
-                  <a:srgbClr val="CE9178"/>
-                </a:solidFill>
-                <a:latin typeface="Courier New" pitchFamily="34" charset="0"/>
-                <a:ea typeface="Courier New" pitchFamily="34" charset="-122"/>
-                <a:cs typeface="Courier New" pitchFamily="34" charset="-120"/>
-              </a:rPr>
-              <a:t>'Bookings'</a:t>
-            </a:r>
-            <a:r>
-              <a:rPr lang="en-US" sz="1050" dirty="0">
-                <a:solidFill>
-                  <a:srgbClr val="CCCCCC"/>
-                </a:solidFill>
-                <a:latin typeface="Courier New" pitchFamily="34" charset="0"/>
-                <a:ea typeface="Courier New" pitchFamily="34" charset="-122"/>
-                <a:cs typeface="Courier New" pitchFamily="34" charset="-120"/>
-              </a:rPr>
-              <a:t>,</a:t>
-            </a:r>
-            <a:r>
-              <a:rPr lang="en-US" sz="1050" dirty="0">
-                <a:solidFill>
-                  <a:srgbClr val="CCCCCC"/>
-                </a:solidFill>
-                <a:latin typeface="Courier New" pitchFamily="34" charset="0"/>
-                <a:ea typeface="Courier New" pitchFamily="34" charset="-122"/>
-                <a:cs typeface="Courier New" pitchFamily="34" charset="-120"/>
-              </a:rPr>
-              <a:t> </a:t>
-            </a:r>
-            <a:r>
-              <a:rPr lang="en-US" sz="1050" dirty="0">
-                <a:solidFill>
-                  <a:srgbClr val="CCCCCC"/>
-                </a:solidFill>
-                <a:latin typeface="Courier New" pitchFamily="34" charset="0"/>
-                <a:ea typeface="Courier New" pitchFamily="34" charset="-122"/>
-                <a:cs typeface="Courier New" pitchFamily="34" charset="-120"/>
-              </a:rPr>
-              <a:t>position</a:t>
-            </a:r>
-            <a:r>
-              <a:rPr lang="en-US" sz="1050" dirty="0">
-                <a:solidFill>
-                  <a:srgbClr val="CCCCCC"/>
-                </a:solidFill>
-                <a:latin typeface="Courier New" pitchFamily="34" charset="0"/>
-                <a:ea typeface="Courier New" pitchFamily="34" charset="-122"/>
-                <a:cs typeface="Courier New" pitchFamily="34" charset="-120"/>
-              </a:rPr>
-              <a:t>:</a:t>
-            </a:r>
-            <a:r>
-              <a:rPr lang="en-US" sz="1050" dirty="0">
-                <a:solidFill>
-                  <a:srgbClr val="CCCCCC"/>
-                </a:solidFill>
-                <a:latin typeface="Courier New" pitchFamily="34" charset="0"/>
-                <a:ea typeface="Courier New" pitchFamily="34" charset="-122"/>
-                <a:cs typeface="Courier New" pitchFamily="34" charset="-120"/>
-              </a:rPr>
-              <a:t> </a:t>
-            </a:r>
-            <a:r>
-              <a:rPr lang="en-US" sz="1050" dirty="0">
-                <a:solidFill>
-                  <a:srgbClr val="B5CEA8"/>
-                </a:solidFill>
-                <a:latin typeface="Courier New" pitchFamily="34" charset="0"/>
-                <a:ea typeface="Courier New" pitchFamily="34" charset="-122"/>
-                <a:cs typeface="Courier New" pitchFamily="34" charset="-120"/>
-              </a:rPr>
-              <a:t>20</a:t>
-            </a:r>
-            <a:r>
-              <a:rPr lang="en-US" sz="1050" dirty="0">
-                <a:solidFill>
-                  <a:srgbClr val="CCCCCC"/>
-                </a:solidFill>
-                <a:latin typeface="Courier New" pitchFamily="34" charset="0"/>
-                <a:ea typeface="Courier New" pitchFamily="34" charset="-122"/>
-                <a:cs typeface="Courier New" pitchFamily="34" charset="-120"/>
-              </a:rPr>
-              <a:t>,</a:t>
-            </a:r>
-            <a:endParaRPr lang="en-US" sz="1050" dirty="0"/>
-          </a:p>
-          <a:p>
-            <a:pPr indent="0" marL="0">
-              <a:lnSpc>
-                <a:spcPct val="105000"/>
-              </a:lnSpc>
-              <a:buNone/>
-            </a:pPr>
-            <a:r>
-              <a:rPr lang="en-US" sz="1050" dirty="0">
-                <a:solidFill>
-                  <a:srgbClr val="CCCCCC"/>
-                </a:solidFill>
-                <a:latin typeface="Courier New" pitchFamily="34" charset="0"/>
-                <a:ea typeface="Courier New" pitchFamily="34" charset="-122"/>
-                <a:cs typeface="Courier New" pitchFamily="34" charset="-120"/>
-              </a:rPr>
-              <a:t>    </a:t>
-            </a:r>
-            <a:r>
-              <a:rPr lang="en-US" sz="1050" dirty="0">
-                <a:solidFill>
-                  <a:srgbClr val="CCCCCC"/>
-                </a:solidFill>
-                <a:latin typeface="Courier New" pitchFamily="34" charset="0"/>
-                <a:ea typeface="Courier New" pitchFamily="34" charset="-122"/>
-                <a:cs typeface="Courier New" pitchFamily="34" charset="-120"/>
-              </a:rPr>
-              <a:t>type</a:t>
-            </a:r>
-            <a:r>
-              <a:rPr lang="en-US" sz="1050" dirty="0">
-                <a:solidFill>
-                  <a:srgbClr val="CCCCCC"/>
-                </a:solidFill>
-                <a:latin typeface="Courier New" pitchFamily="34" charset="0"/>
-                <a:ea typeface="Courier New" pitchFamily="34" charset="-122"/>
-                <a:cs typeface="Courier New" pitchFamily="34" charset="-120"/>
-              </a:rPr>
-              <a:t>:</a:t>
-            </a:r>
-            <a:r>
-              <a:rPr lang="en-US" sz="1050" dirty="0">
-                <a:solidFill>
-                  <a:srgbClr val="CCCCCC"/>
-                </a:solidFill>
-                <a:latin typeface="Courier New" pitchFamily="34" charset="0"/>
-                <a:ea typeface="Courier New" pitchFamily="34" charset="-122"/>
-                <a:cs typeface="Courier New" pitchFamily="34" charset="-120"/>
-              </a:rPr>
-              <a:t> </a:t>
-            </a:r>
-            <a:r>
-              <a:rPr lang="en-US" sz="1050" dirty="0">
-                <a:solidFill>
-                  <a:srgbClr val="CCCCCC"/>
-                </a:solidFill>
-                <a:latin typeface="Courier New" pitchFamily="34" charset="0"/>
-                <a:ea typeface="Courier New" pitchFamily="34" charset="-122"/>
-                <a:cs typeface="Courier New" pitchFamily="34" charset="-120"/>
-              </a:rPr>
-              <a:t>#</a:t>
-            </a:r>
-            <a:r>
-              <a:rPr lang="en-US" sz="1050" dirty="0">
-                <a:solidFill>
-                  <a:srgbClr val="CCCCCC"/>
-                </a:solidFill>
-                <a:latin typeface="Courier New" pitchFamily="34" charset="0"/>
-                <a:ea typeface="Courier New" pitchFamily="34" charset="-122"/>
-                <a:cs typeface="Courier New" pitchFamily="34" charset="-120"/>
-              </a:rPr>
-              <a:t>LINEITEM_REFERENCE</a:t>
-            </a:r>
-            <a:r>
-              <a:rPr lang="en-US" sz="1050" dirty="0">
-                <a:solidFill>
-                  <a:srgbClr val="CCCCCC"/>
-                </a:solidFill>
-                <a:latin typeface="Courier New" pitchFamily="34" charset="0"/>
-                <a:ea typeface="Courier New" pitchFamily="34" charset="-122"/>
-                <a:cs typeface="Courier New" pitchFamily="34" charset="-120"/>
-              </a:rPr>
-              <a:t>,</a:t>
-            </a:r>
-            <a:r>
-              <a:rPr lang="en-US" sz="1050" dirty="0">
-                <a:solidFill>
-                  <a:srgbClr val="CCCCCC"/>
-                </a:solidFill>
-                <a:latin typeface="Courier New" pitchFamily="34" charset="0"/>
-                <a:ea typeface="Courier New" pitchFamily="34" charset="-122"/>
-                <a:cs typeface="Courier New" pitchFamily="34" charset="-120"/>
-              </a:rPr>
-              <a:t> </a:t>
-            </a:r>
-            <a:r>
-              <a:rPr lang="en-US" sz="1050" dirty="0">
-                <a:solidFill>
-                  <a:srgbClr val="CCCCCC"/>
-                </a:solidFill>
-                <a:latin typeface="Courier New" pitchFamily="34" charset="0"/>
-                <a:ea typeface="Courier New" pitchFamily="34" charset="-122"/>
-                <a:cs typeface="Courier New" pitchFamily="34" charset="-120"/>
-              </a:rPr>
-              <a:t>targetElement</a:t>
-            </a:r>
-            <a:r>
-              <a:rPr lang="en-US" sz="1050" dirty="0">
-                <a:solidFill>
-                  <a:srgbClr val="CCCCCC"/>
-                </a:solidFill>
-                <a:latin typeface="Courier New" pitchFamily="34" charset="0"/>
-                <a:ea typeface="Courier New" pitchFamily="34" charset="-122"/>
-                <a:cs typeface="Courier New" pitchFamily="34" charset="-120"/>
-              </a:rPr>
-              <a:t>:</a:t>
-            </a:r>
-            <a:r>
-              <a:rPr lang="en-US" sz="1050" dirty="0">
-                <a:solidFill>
-                  <a:srgbClr val="CCCCCC"/>
-                </a:solidFill>
-                <a:latin typeface="Courier New" pitchFamily="34" charset="0"/>
-                <a:ea typeface="Courier New" pitchFamily="34" charset="-122"/>
-                <a:cs typeface="Courier New" pitchFamily="34" charset="-120"/>
-              </a:rPr>
-              <a:t> </a:t>
-            </a:r>
-            <a:r>
-              <a:rPr lang="en-US" sz="1050" dirty="0">
-                <a:solidFill>
-                  <a:srgbClr val="CE9178"/>
-                </a:solidFill>
-                <a:latin typeface="Courier New" pitchFamily="34" charset="0"/>
-                <a:ea typeface="Courier New" pitchFamily="34" charset="-122"/>
-                <a:cs typeface="Courier New" pitchFamily="34" charset="-120"/>
-              </a:rPr>
-              <a:t>'_Booking'</a:t>
+              <a:t>'_Itens'</a:t>
             </a:r>
             <a:r>
               <a:rPr lang="en-US" sz="1050" dirty="0">
@@ -5587,7 +5371,7 @@
                   <a:srgbClr val="556B82"/>
                 </a:solidFill>
               </a:rPr>
-              <a:t>A faceta vai para o header content, aqui um data point de preço.</a:t>
+              <a:t>A faceta vai para o header content: aqui, o valor total do pedido.</a:t>
             </a:r>
             <a:endParaRPr lang="en-US" sz="1400" dirty="0"/>
           </a:p>
@@ -5679,10 +5463,13 @@
             <a:r>
               <a:rPr lang="en-US" sz="1250" b="1" dirty="0">
                 <a:solidFill>
-                  <a:srgbClr val="1D2D3E"/>
-                </a:solidFill>
-              </a:rPr>
-              <a:t>Collection + reference</a:t>
+                  <a:srgbClr val="0064D9"/>
+                </a:solidFill>
+                <a:latin typeface="Courier New" pitchFamily="34" charset="0"/>
+                <a:ea typeface="Courier New" pitchFamily="34" charset="-122"/>
+                <a:cs typeface="Courier New" pitchFamily="34" charset="-120"/>
+              </a:rPr>
+              <a:t>#FIELDGROUP_REFERENCE</a:t>
             </a:r>
             <a:endParaRPr lang="en-US" sz="1400" dirty="0"/>
           </a:p>
@@ -5704,7 +5491,7 @@
                   <a:srgbClr val="556B82"/>
                 </a:solidFill>
               </a:rPr>
-              <a:t>General Information</a:t>
+              <a:t>Dados do Cliente</a:t>
             </a:r>
             <a:r>
               <a:rPr lang="en-US" sz="1050" dirty="0">
@@ -5712,23 +5499,26 @@
                   <a:srgbClr val="556B82"/>
                 </a:solidFill>
               </a:rPr>
-              <a:t> com a subseção </a:t>
-            </a:r>
-            <a:r>
-              <a:rPr lang="en-US" sz="1050" i="1" dirty="0">
+              <a:t> com os campos do field group </a:t>
+            </a:r>
+            <a:r>
+              <a:rPr lang="en-US" sz="1050" dirty="0">
+                <a:solidFill>
+                  <a:srgbClr val="0064D9"/>
+                </a:solidFill>
+                <a:latin typeface="Courier New" pitchFamily="34" charset="0"/>
+                <a:ea typeface="Courier New" pitchFamily="34" charset="-122"/>
+                <a:cs typeface="Courier New" pitchFamily="34" charset="-120"/>
+              </a:rPr>
+              <a:t>Cliente</a:t>
+            </a:r>
+            <a:r>
+              <a:rPr lang="en-US" sz="1050" dirty="0">
                 <a:solidFill>
                   <a:srgbClr val="556B82"/>
                 </a:solidFill>
               </a:rPr>
-              <a:t>Prices</a:t>
-            </a:r>
-            <a:r>
-              <a:rPr lang="en-US" sz="1050" dirty="0">
-                <a:solidFill>
-                  <a:srgbClr val="556B82"/>
-                </a:solidFill>
-              </a:rPr>
-              <a:t> de um field group.</a:t>
+              <a:t>.</a:t>
             </a:r>
             <a:endParaRPr lang="en-US" sz="1400" dirty="0"/>
           </a:p>
@@ -5859,7 +5649,7 @@
                   <a:srgbClr val="556B82"/>
                 </a:solidFill>
               </a:rPr>
-              <a:t> da entidade Booking.</a:t>
+              <a:t> da entidade ItemPedido.</a:t>
             </a:r>
             <a:endParaRPr lang="en-US" sz="1400" dirty="0"/>
           </a:p>
@@ -6113,7 +5903,7 @@
                   <a:srgbClr val="FFFFFF"/>
                 </a:solidFill>
               </a:rPr>
-              <a:t>O que aprendemos na aula 03.05</a:t>
+              <a:t>O que aprendemos na aula 05.05</a:t>
             </a:r>
             <a:endParaRPr lang="en-US" sz="3200" dirty="0"/>
           </a:p>
@@ -6709,7 +6499,7 @@
                   <a:srgbClr val="89D1FF"/>
                 </a:solidFill>
               </a:rPr>
-              <a:t>Próxima aula · 03.06  </a:t>
+              <a:t>Próxima aula · 05.06  </a:t>
             </a:r>
             <a:r>
               <a:rPr lang="en-US" sz="1500" dirty="0">
@@ -6986,7 +6776,7 @@
                   <a:srgbClr val="1D2D3E"/>
                 </a:solidFill>
               </a:rPr>
-              <a:t>Módulo 03 em 11 aulas: Fiori Elements com OData V4</a:t>
+              <a:t>Módulo 05 em 11 aulas: Fiori Elements com OData V4</a:t>
             </a:r>
             <a:endParaRPr lang="en-US" sz="2800" dirty="0"/>
           </a:p>
@@ -8856,7 +8646,7 @@
                   <a:srgbClr val="1D2D3E"/>
                 </a:solidFill>
               </a:rPr>
-              <a:t>escolhemos o floorplan certo para cada caso e entendemos cada região das páginas do app de viagens.</a:t>
+              <a:t>escolhemos o floorplan certo para cada caso e entendemos cada região das páginas do app Pedidos de Compras.</a:t>
             </a:r>
             <a:endParaRPr lang="en-US" sz="1400" dirty="0"/>
           </a:p>
@@ -8878,7 +8668,7 @@
         </p:blipFill>
         <p:spPr>
           <a:xfrm>
-            <a:off x="1696669" y="1847088"/>
+            <a:off x="3576218" y="1847088"/>
             <a:ext cx="347472" cy="347472"/>
           </a:xfrm>
           <a:prstGeom prst="rect">
@@ -8902,7 +8692,7 @@
         </p:blipFill>
         <p:spPr>
           <a:xfrm>
-            <a:off x="3576218" y="1847088"/>
+            <a:off x="1696669" y="1847088"/>
             <a:ext cx="347472" cy="347472"/>
           </a:xfrm>
           <a:prstGeom prst="rect">
@@ -8950,7 +8740,7 @@
         </p:blipFill>
         <p:spPr>
           <a:xfrm>
-            <a:off x="7335317" y="1847088"/>
+            <a:off x="9214866" y="1847088"/>
             <a:ext cx="347472" cy="347472"/>
           </a:xfrm>
           <a:prstGeom prst="rect">
@@ -8974,7 +8764,7 @@
         </p:blipFill>
         <p:spPr>
           <a:xfrm>
-            <a:off x="9214866" y="1847088"/>
+            <a:off x="7335317" y="1847088"/>
             <a:ext cx="347472" cy="347472"/>
           </a:xfrm>
           <a:prstGeom prst="rect">
@@ -9094,7 +8884,7 @@
         </p:blipFill>
         <p:spPr>
           <a:xfrm>
-            <a:off x="7335317" y="3858768"/>
+            <a:off x="9214866" y="3858768"/>
             <a:ext cx="347472" cy="347472"/>
           </a:xfrm>
           <a:prstGeom prst="rect">
@@ -9118,7 +8908,7 @@
         </p:blipFill>
         <p:spPr>
           <a:xfrm>
-            <a:off x="9214866" y="3858768"/>
+            <a:off x="7335317" y="3858768"/>
             <a:ext cx="347472" cy="347472"/>
           </a:xfrm>
           <a:prstGeom prst="rect">
@@ -9943,7 +9733,7 @@
                   <a:srgbClr val="89D1FF"/>
                 </a:solidFill>
               </a:rPr>
-              <a:t>AULA 03.05 · SEÇÃO 1</a:t>
+              <a:t>AULA 05.05 · SEÇÃO 1</a:t>
             </a:r>
             <a:endParaRPr lang="en-US" sz="1300" dirty="0"/>
           </a:p>
@@ -11343,7 +11133,7 @@
                   <a:srgbClr val="0064D9"/>
                 </a:solidFill>
               </a:rPr>
-              <a:t>No curso  </a:t>
+              <a:t>No projeto  </a:t>
             </a:r>
             <a:r>
               <a:rPr lang="en-US" sz="1200" dirty="0">
@@ -11367,7 +11157,7 @@
                   <a:srgbClr val="1D2D3E"/>
                 </a:solidFill>
               </a:rPr>
-              <a:t> gera o par List Report + Object Page do app Manage Travels.</a:t>
+              <a:t> gera o par List Report + Object Page de cada app de gestão: clientes, estoque, pedidos e reembolsos.</a:t>
             </a:r>
             <a:endParaRPr lang="en-US" sz="1400" dirty="0"/>
           </a:p>
@@ -11519,7 +11309,7 @@
                   <a:srgbClr val="89D1FF"/>
                 </a:solidFill>
               </a:rPr>
-              <a:t>AULA 03.05 · SEÇÃO 2</a:t>
+              <a:t>AULA 05.05 · SEÇÃO 2</a:t>
             </a:r>
             <a:endParaRPr lang="en-US" sz="1300" dirty="0"/>
           </a:p>
@@ -13129,7 +12919,7 @@
                   <a:srgbClr val="89D1FF"/>
                 </a:solidFill>
               </a:rPr>
-              <a:t>AULA 03.05 · SEÇÃO 3</a:t>
+              <a:t>AULA 05.05 · SEÇÃO 3</a:t>
             </a:r>
             <a:endParaRPr lang="en-US" sz="1300" dirty="0"/>
           </a:p>
